--- a/content/Lectures/Semester 1/Week 04 - Mathematical Programming - Modelling/5 Source Files/Slack Variables.pptx
+++ b/content/Lectures/Semester 1/Week 04 - Mathematical Programming - Modelling/5 Source Files/Slack Variables.pptx
@@ -3808,7 +3808,7 @@
               <a:p>
                 <a:r>
                   <a:rPr lang="en-GB" dirty="0"/>
-                  <a:t>Used for less than </a:t>
+                  <a:t>Used for ≤ (less than or equal to) constraints</a:t>
                 </a:r>
               </a:p>
               <a:p>
@@ -4029,7 +4029,7 @@
               <a:p>
                 <a:r>
                   <a:rPr lang="en-GB" dirty="0"/>
-                  <a:t>Used for greater than</a:t>
+                  <a:t>Used for ≥ (greater than or equal to) constraints</a:t>
                 </a:r>
               </a:p>
               <a:p>
@@ -4805,7 +4805,7 @@
                         <a:rPr lang="en-GB" sz="2400" b="0" i="1" smtClean="0">
                           <a:latin typeface="Cambria Math" panose="02040503050406030204" pitchFamily="18" charset="0"/>
                         </a:rPr>
-                        <m:t>=5⋅0+7⋅0=0</m:t>
+                        <m:t>=5⋅0+4⋅0=0</m:t>
                       </m:r>
                     </m:oMath>
                   </m:oMathPara>
